--- a/skills/presentations/assets/pptx/examples/08-period-start-planning.pptx
+++ b/skills/presentations/assets/pptx/examples/08-period-start-planning.pptx
@@ -5,15 +5,15 @@
     <p:sldMasterId xmlns:r="http://schemas.openxmlformats.org/officeDocument/2006/relationships" id="2147483648" r:id="rId1"/>
   </p:sldMasterIdLst>
   <p:notesMasterIdLst>
-    <p:notesMasterId r:id="R84c6ad2847994973"/>
+    <p:notesMasterId r:id="R09688aaa7c794e51"/>
   </p:notesMasterIdLst>
   <p:sldIdLst>
-    <p:sldId id="256" r:id="Rb1b87c6e185944b7"/>
-    <p:sldId id="257" r:id="R7a74869cb75344da"/>
-    <p:sldId id="258" r:id="R08996627539c494f"/>
-    <p:sldId id="259" r:id="Rd64a3248efe74448"/>
-    <p:sldId id="260" r:id="R86e8130d2d6c4671"/>
-    <p:sldId id="261" r:id="R11792c4fd96d40c1"/>
+    <p:sldId id="256" r:id="R15bf4d511628415d"/>
+    <p:sldId id="257" r:id="Re1bf16d5909946be"/>
+    <p:sldId id="258" r:id="R4a9bbcb745224eca"/>
+    <p:sldId id="259" r:id="R7c9ff4c1069c44a0"/>
+    <p:sldId id="260" r:id="Rf8a51dc9f18e4d38"/>
+    <p:sldId id="261" r:id="R50f392a87920424b"/>
   </p:sldIdLst>
   <p:sldSz cx="12192000" cy="6858000"/>
   <p:notesSz cx="6858000" cy="9144000"/>
@@ -1315,7 +1315,7 @@
                 <a:latin typeface="Calibri"/>
                 <a:ea typeface="Calibri"/>
               </a:rPr>
-              <a:t>Period goal: sample support + revB AON start  ·  Ask: Endorse Option B 2026-07-01</a:t>
+              <a:t>Period goal: sample support + revB AON start  ·  Ask: Endorse Option B on 2026-07-01 kickoff</a:t>
             </a:r>
           </a:p>
         </p:txBody>
@@ -1350,7 +1350,7 @@
                 <a:latin typeface="Calibri"/>
                 <a:ea typeface="Calibri"/>
               </a:rPr>
-              <a:t>COMMIT: Tier-1 sample support SLA; revB AON dual-mux RTL start; USB3 closed.</a:t>
+              <a:t>COMMIT: Tier-1 sample support SLA (samples shipped 6/30); revB AON dual-mux RTL start; USB3 closed.</a:t>
             </a:r>
           </a:p>
           <a:p xmlns:a="http://schemas.openxmlformats.org/drawingml/2006/main">
@@ -1398,7 +1398,7 @@
                 <a:latin typeface="Calibri"/>
                 <a:ea typeface="Calibri"/>
               </a:rPr>
-              <a:t>Assumes +1 DV offer accepted by mid-July.</a:t>
+              <a:t>Assumes +1 DV offer accepted by mid-July (req opened ~5/22).</a:t>
             </a:r>
           </a:p>
         </p:txBody>
@@ -1688,7 +1688,7 @@
                 <a:latin typeface="Calibri"/>
                 <a:ea typeface="Calibri"/>
               </a:rPr>
-              <a:t>7/15 USB3 exit · 8/01 WiFi gate · 9/15 revB RTL review</a:t>
+              <a:t>Milestones after sample: 7/15 USB3 exit · 8/01 WiFi gate · 9/15 revB RTL review</a:t>
             </a:r>
           </a:p>
           <a:p xmlns:a="http://schemas.openxmlformats.org/drawingml/2006/main">

--- a/skills/presentations/assets/pptx/examples/08-period-start-planning.pptx
+++ b/skills/presentations/assets/pptx/examples/08-period-start-planning.pptx
@@ -5,15 +5,16 @@
     <p:sldMasterId xmlns:r="http://schemas.openxmlformats.org/officeDocument/2006/relationships" id="2147483648" r:id="rId1"/>
   </p:sldMasterIdLst>
   <p:notesMasterIdLst>
-    <p:notesMasterId r:id="R09688aaa7c794e51"/>
+    <p:notesMasterId r:id="R9c3a82937ebf4f23"/>
   </p:notesMasterIdLst>
   <p:sldIdLst>
-    <p:sldId id="256" r:id="R15bf4d511628415d"/>
-    <p:sldId id="257" r:id="Re1bf16d5909946be"/>
-    <p:sldId id="258" r:id="R4a9bbcb745224eca"/>
-    <p:sldId id="259" r:id="R7c9ff4c1069c44a0"/>
-    <p:sldId id="260" r:id="Rf8a51dc9f18e4d38"/>
-    <p:sldId id="261" r:id="R50f392a87920424b"/>
+    <p:sldId id="256" r:id="R9851a1b6a4164ec4"/>
+    <p:sldId id="257" r:id="R53c443695e754207"/>
+    <p:sldId id="258" r:id="R82d182de939f430b"/>
+    <p:sldId id="259" r:id="Rd464be214cbe4242"/>
+    <p:sldId id="260" r:id="R3de32d78de424c1c"/>
+    <p:sldId id="261" r:id="R5fed7613dad04a1a"/>
+    <p:sldId id="262" r:id="R99894374e2fb4548"/>
   </p:sldIdLst>
   <p:sldSz cx="12192000" cy="6858000"/>
   <p:notesSz cx="6858000" cy="9144000"/>
@@ -479,6 +480,30 @@
               <a:t>Cover (example). Q3 kickoff balanced: sample+revB commit, WiFi stretch.</a:t>
             </a:r>
           </a:p>
+          <a:p xmlns:a="http://schemas.openxmlformats.org/drawingml/2006/main">
+            <a:r>
+              <a:rPr lang="en-US"/>
+              <a:t/>
+            </a:r>
+          </a:p>
+          <a:p xmlns:a="http://schemas.openxmlformats.org/drawingml/2006/main">
+            <a:r>
+              <a:rPr lang="en-US"/>
+              <a:t>Commit / stretch / out period kickoff</a:t>
+            </a:r>
+          </a:p>
+          <a:p xmlns:a="http://schemas.openxmlformats.org/drawingml/2006/main">
+            <a:r>
+              <a:rPr lang="en-US"/>
+              <a:t>EM Tools — Roadmap / planning kickoff norms: https://www.em-tools.io/engineering-manager-responsibilities/roadmap-planning</a:t>
+            </a:r>
+          </a:p>
+          <a:p xmlns:a="http://schemas.openxmlformats.org/drawingml/2006/main">
+            <a:r>
+              <a:rPr lang="en-US"/>
+              <a:t>BLUF executive framing: https://www.getorvo.com/learn/executive-communication-strategy</a:t>
+            </a:r>
+          </a:p>
         </p:txBody>
       </p:sp>
     </p:spTree>
@@ -531,7 +556,19 @@
           <a:p xmlns:a="http://schemas.openxmlformats.org/drawingml/2006/main">
             <a:r>
               <a:rPr lang="en-US"/>
-              <a:t>Balanced commit with stretch labeled.</a:t>
+              <a:t>Commit / stretch / out period kickoff</a:t>
+            </a:r>
+          </a:p>
+          <a:p xmlns:a="http://schemas.openxmlformats.org/drawingml/2006/main">
+            <a:r>
+              <a:rPr lang="en-US"/>
+              <a:t>EM Tools — Roadmap / planning kickoff norms: https://www.em-tools.io/engineering-manager-responsibilities/roadmap-planning</a:t>
+            </a:r>
+          </a:p>
+          <a:p xmlns:a="http://schemas.openxmlformats.org/drawingml/2006/main">
+            <a:r>
+              <a:rPr lang="en-US"/>
+              <a:t>BLUF executive framing: https://www.getorvo.com/learn/executive-communication-strategy</a:t>
             </a:r>
           </a:p>
         </p:txBody>
@@ -586,7 +623,7 @@
           <a:p xmlns:a="http://schemas.openxmlformats.org/drawingml/2006/main">
             <a:r>
               <a:rPr lang="en-US"/>
-              <a:t>Clear commit/stretch/out.</a:t>
+              <a:t>Balanced commit with stretch labeled.</a:t>
             </a:r>
           </a:p>
         </p:txBody>
@@ -641,7 +678,7 @@
           <a:p xmlns:a="http://schemas.openxmlformats.org/drawingml/2006/main">
             <a:r>
               <a:rPr lang="en-US"/>
-              <a:t>OS + gates.</a:t>
+              <a:t>Clear commit/stretch/out.</a:t>
             </a:r>
           </a:p>
         </p:txBody>
@@ -696,7 +733,7 @@
           <a:p xmlns:a="http://schemas.openxmlformats.org/drawingml/2006/main">
             <a:r>
               <a:rPr lang="en-US"/>
-              <a:t>Walk trade-offs; land recommendation.</a:t>
+              <a:t>OS + gates.</a:t>
             </a:r>
           </a:p>
         </p:txBody>
@@ -710,6 +747,61 @@
 </file>
 
 <file path=ppt/notesSlides/notesSlide6.xml><?xml version="1.0" encoding="utf-8"?>
+<p:notes xmlns:p="http://schemas.openxmlformats.org/presentationml/2006/main">
+  <p:cSld>
+    <p:spTree>
+      <p:nvGrpSpPr>
+        <p:cNvPr id="1" name=""/>
+        <p:cNvGrpSpPr/>
+        <p:nvPr/>
+      </p:nvGrpSpPr>
+      <p:grpSpPr>
+        <a:xfrm xmlns:a="http://schemas.openxmlformats.org/drawingml/2006/main"/>
+      </p:grpSpPr>
+      <p:sp>
+        <p:nvSpPr>
+          <p:cNvPr id="2" name="Slide Image Placeholder 1"/>
+          <p:cNvSpPr/>
+          <p:nvPr>
+            <p:ph type="sldImg" idx="0"/>
+          </p:nvPr>
+        </p:nvSpPr>
+        <p:spPr/>
+        <p:txBody>
+          <a:bodyPr xmlns:a="http://schemas.openxmlformats.org/drawingml/2006/main"/>
+          <a:lstStyle xmlns:a="http://schemas.openxmlformats.org/drawingml/2006/main"/>
+          <a:p xmlns:a="http://schemas.openxmlformats.org/drawingml/2006/main"/>
+        </p:txBody>
+      </p:sp>
+      <p:sp>
+        <p:nvSpPr>
+          <p:cNvPr id="3" name="Notes Placeholder 2"/>
+          <p:cNvSpPr/>
+          <p:nvPr>
+            <p:ph type="body" idx="1"/>
+          </p:nvPr>
+        </p:nvSpPr>
+        <p:spPr/>
+        <p:txBody>
+          <a:bodyPr xmlns:a="http://schemas.openxmlformats.org/drawingml/2006/main"/>
+          <a:lstStyle xmlns:a="http://schemas.openxmlformats.org/drawingml/2006/main"/>
+          <a:p xmlns:a="http://schemas.openxmlformats.org/drawingml/2006/main">
+            <a:r>
+              <a:rPr lang="en-US"/>
+              <a:t>Walk trade-offs; land recommendation.</a:t>
+            </a:r>
+          </a:p>
+        </p:txBody>
+      </p:sp>
+    </p:spTree>
+  </p:cSld>
+  <p:clrMapOvr>
+    <a:masterClrMapping xmlns:a="http://schemas.openxmlformats.org/drawingml/2006/main"/>
+  </p:clrMapOvr>
+</p:notes>
+</file>
+
+<file path=ppt/notesSlides/notesSlide7.xml><?xml version="1.0" encoding="utf-8"?>
 <p:notes xmlns:p="http://schemas.openxmlformats.org/presentationml/2006/main">
   <p:cSld>
     <p:spTree>
@@ -1079,8 +1171,8 @@
         </p:nvSpPr>
         <p:spPr>
           <a:xfrm xmlns:a="http://schemas.openxmlformats.org/drawingml/2006/main">
-            <a:off x="504000" y="1008000"/>
-            <a:ext cx="11088000" cy="324000"/>
+            <a:off x="504000" y="936000"/>
+            <a:ext cx="11088000" cy="306000"/>
           </a:xfrm>
           <a:prstGeom xmlns:a="http://schemas.openxmlformats.org/drawingml/2006/main" prst="rect">
             <a:avLst/>
@@ -1111,8 +1203,8 @@
         </p:nvSpPr>
         <p:spPr>
           <a:xfrm xmlns:a="http://schemas.openxmlformats.org/drawingml/2006/main">
-            <a:off x="504000" y="1440000"/>
-            <a:ext cx="11088000" cy="936000"/>
+            <a:off x="504000" y="1332000"/>
+            <a:ext cx="11088000" cy="900000"/>
           </a:xfrm>
           <a:prstGeom xmlns:a="http://schemas.openxmlformats.org/drawingml/2006/main" prst="rect">
             <a:avLst/>
@@ -1123,7 +1215,7 @@
           <a:lstStyle xmlns:a="http://schemas.openxmlformats.org/drawingml/2006/main"/>
           <a:p xmlns:a="http://schemas.openxmlformats.org/drawingml/2006/main">
             <a:r>
-              <a:rPr lang="en-US" sz="3400" b="1">
+              <a:rPr lang="en-US" sz="3200" b="1">
                 <a:solidFill>
                   <a:srgbClr val="FFFFFF"/>
                 </a:solidFill>
@@ -1143,8 +1235,8 @@
         </p:nvSpPr>
         <p:spPr>
           <a:xfrm xmlns:a="http://schemas.openxmlformats.org/drawingml/2006/main">
-            <a:off x="504000" y="2520000"/>
-            <a:ext cx="11088000" cy="720000"/>
+            <a:off x="504000" y="2340000"/>
+            <a:ext cx="11088000" cy="648000"/>
           </a:xfrm>
           <a:prstGeom xmlns:a="http://schemas.openxmlformats.org/drawingml/2006/main" prst="rect">
             <a:avLst/>
@@ -1155,7 +1247,7 @@
           <a:lstStyle xmlns:a="http://schemas.openxmlformats.org/drawingml/2006/main"/>
           <a:p xmlns:a="http://schemas.openxmlformats.org/drawingml/2006/main">
             <a:r>
-              <a:rPr lang="en-US" sz="1700" b="0">
+              <a:rPr lang="en-US" sz="1600" b="0">
                 <a:solidFill>
                   <a:srgbClr val="CADCFC"/>
                 </a:solidFill>
@@ -1170,6 +1262,38 @@
       <p:sp>
         <p:nvSpPr>
           <p:cNvPr id="100003" name="TextBox 4"/>
+          <p:cNvSpPr txBox="1"/>
+          <p:nvPr/>
+        </p:nvSpPr>
+        <p:spPr>
+          <a:xfrm xmlns:a="http://schemas.openxmlformats.org/drawingml/2006/main">
+            <a:off x="504000" y="3240000"/>
+            <a:ext cx="11088000" cy="576000"/>
+          </a:xfrm>
+          <a:prstGeom xmlns:a="http://schemas.openxmlformats.org/drawingml/2006/main" prst="rect">
+            <a:avLst/>
+          </a:prstGeom>
+        </p:spPr>
+        <p:txBody>
+          <a:bodyPr xmlns:a="http://schemas.openxmlformats.org/drawingml/2006/main"/>
+          <a:lstStyle xmlns:a="http://schemas.openxmlformats.org/drawingml/2006/main"/>
+          <a:p xmlns:a="http://schemas.openxmlformats.org/drawingml/2006/main">
+            <a:r>
+              <a:rPr lang="en-US" sz="1400" b="0">
+                <a:solidFill>
+                  <a:srgbClr val="A0C4E8"/>
+                </a:solidFill>
+                <a:latin typeface="Calibri"/>
+                <a:ea typeface="Calibri"/>
+              </a:rPr>
+              <a:t>Pattern: Commit / stretch / out period kickoff</a:t>
+            </a:r>
+          </a:p>
+        </p:txBody>
+      </p:sp>
+      <p:sp>
+        <p:nvSpPr>
+          <p:cNvPr id="100004" name="TextBox 5"/>
           <p:cNvSpPr txBox="1"/>
           <p:nvPr/>
         </p:nvSpPr>
@@ -1205,6 +1329,279 @@
 </file>
 
 <file path=ppt/slides/slide2.xml><?xml version="1.0" encoding="utf-8"?>
+<p:sld xmlns:p="http://schemas.openxmlformats.org/presentationml/2006/main">
+  <p:cSld name="Pattern provenance">
+    <p:bg>
+      <p:bgPr>
+        <a:solidFill xmlns:a="http://schemas.openxmlformats.org/drawingml/2006/main">
+          <a:srgbClr val="F4F7FC"/>
+        </a:solidFill>
+      </p:bgPr>
+    </p:bg>
+    <p:spTree>
+      <p:nvGrpSpPr>
+        <p:cNvPr id="1" name=""/>
+        <p:cNvGrpSpPr/>
+        <p:nvPr/>
+      </p:nvGrpSpPr>
+      <p:grpSpPr/>
+      <p:sp>
+        <p:nvSpPr>
+          <p:cNvPr id="100005" name="TextBox 1"/>
+          <p:cNvSpPr txBox="1"/>
+          <p:nvPr/>
+        </p:nvSpPr>
+        <p:spPr>
+          <a:xfrm xmlns:a="http://schemas.openxmlformats.org/drawingml/2006/main">
+            <a:off x="504000" y="270000"/>
+            <a:ext cx="11088000" cy="270000"/>
+          </a:xfrm>
+          <a:prstGeom xmlns:a="http://schemas.openxmlformats.org/drawingml/2006/main" prst="rect">
+            <a:avLst/>
+          </a:prstGeom>
+        </p:spPr>
+        <p:txBody>
+          <a:bodyPr xmlns:a="http://schemas.openxmlformats.org/drawingml/2006/main"/>
+          <a:lstStyle xmlns:a="http://schemas.openxmlformats.org/drawingml/2006/main"/>
+          <a:p xmlns:a="http://schemas.openxmlformats.org/drawingml/2006/main">
+            <a:r>
+              <a:rPr lang="en-US" sz="1100" b="1">
+                <a:solidFill>
+                  <a:srgbClr val="2B6CB0"/>
+                </a:solidFill>
+                <a:latin typeface="Calibri"/>
+                <a:ea typeface="Calibri"/>
+              </a:rPr>
+              <a:t>WHERE THIS DECK SHAPE COMES FROM</a:t>
+            </a:r>
+          </a:p>
+        </p:txBody>
+      </p:sp>
+      <p:sp>
+        <p:nvSpPr>
+          <p:cNvPr id="100006" name="TextBox 2"/>
+          <p:cNvSpPr txBox="1"/>
+          <p:nvPr/>
+        </p:nvSpPr>
+        <p:spPr>
+          <a:xfrm xmlns:a="http://schemas.openxmlformats.org/drawingml/2006/main">
+            <a:off x="504000" y="558000"/>
+            <a:ext cx="11088000" cy="612000"/>
+          </a:xfrm>
+          <a:prstGeom xmlns:a="http://schemas.openxmlformats.org/drawingml/2006/main" prst="rect">
+            <a:avLst/>
+          </a:prstGeom>
+        </p:spPr>
+        <p:txBody>
+          <a:bodyPr xmlns:a="http://schemas.openxmlformats.org/drawingml/2006/main"/>
+          <a:lstStyle xmlns:a="http://schemas.openxmlformats.org/drawingml/2006/main"/>
+          <a:p xmlns:a="http://schemas.openxmlformats.org/drawingml/2006/main">
+            <a:r>
+              <a:rPr lang="en-US" sz="2800" b="1">
+                <a:solidFill>
+                  <a:srgbClr val="1A202C"/>
+                </a:solidFill>
+                <a:latin typeface="Calibri"/>
+                <a:ea typeface="Calibri"/>
+              </a:rPr>
+              <a:t>Pattern provenance</a:t>
+            </a:r>
+          </a:p>
+        </p:txBody>
+      </p:sp>
+      <p:sp>
+        <p:nvSpPr>
+          <p:cNvPr id="100007" name="TextBox 3"/>
+          <p:cNvSpPr txBox="1"/>
+          <p:nvPr/>
+        </p:nvSpPr>
+        <p:spPr>
+          <a:xfrm xmlns:a="http://schemas.openxmlformats.org/drawingml/2006/main">
+            <a:off x="504000" y="1260000"/>
+            <a:ext cx="11088000" cy="4860000"/>
+          </a:xfrm>
+          <a:prstGeom xmlns:a="http://schemas.openxmlformats.org/drawingml/2006/main" prst="rect">
+            <a:avLst/>
+          </a:prstGeom>
+          <a:solidFill xmlns:a="http://schemas.openxmlformats.org/drawingml/2006/main">
+            <a:srgbClr val="FFFFFF"/>
+          </a:solidFill>
+        </p:spPr>
+        <p:txBody>
+          <a:bodyPr xmlns:a="http://schemas.openxmlformats.org/drawingml/2006/main"/>
+          <a:lstStyle xmlns:a="http://schemas.openxmlformats.org/drawingml/2006/main"/>
+          <a:p xmlns:a="http://schemas.openxmlformats.org/drawingml/2006/main">
+            <a:r>
+              <a:rPr lang="en-US" sz="1500" b="0">
+                <a:solidFill>
+                  <a:srgbClr val="1A202C"/>
+                </a:solidFill>
+                <a:latin typeface="Calibri"/>
+                <a:ea typeface="Calibri"/>
+              </a:rPr>
+              <a:t>Public pattern (structure only — not a confidential company deck):</a:t>
+            </a:r>
+          </a:p>
+          <a:p xmlns:a="http://schemas.openxmlformats.org/drawingml/2006/main">
+            <a:r>
+              <a:rPr lang="en-US" sz="1500" b="0">
+                <a:solidFill>
+                  <a:srgbClr val="1A202C"/>
+                </a:solidFill>
+                <a:latin typeface="Calibri"/>
+                <a:ea typeface="Calibri"/>
+              </a:rPr>
+              <a:t/>
+            </a:r>
+          </a:p>
+          <a:p xmlns:a="http://schemas.openxmlformats.org/drawingml/2006/main">
+            <a:r>
+              <a:rPr lang="en-US" sz="1500" b="0">
+                <a:solidFill>
+                  <a:srgbClr val="1A202C"/>
+                </a:solidFill>
+                <a:latin typeface="Calibri"/>
+                <a:ea typeface="Calibri"/>
+              </a:rPr>
+              <a:t>Commit / stretch / out period kickoff</a:t>
+            </a:r>
+          </a:p>
+          <a:p xmlns:a="http://schemas.openxmlformats.org/drawingml/2006/main">
+            <a:r>
+              <a:rPr lang="en-US" sz="1500" b="0">
+                <a:solidFill>
+                  <a:srgbClr val="1A202C"/>
+                </a:solidFill>
+                <a:latin typeface="Calibri"/>
+                <a:ea typeface="Calibri"/>
+              </a:rPr>
+              <a:t/>
+            </a:r>
+          </a:p>
+          <a:p xmlns:a="http://schemas.openxmlformats.org/drawingml/2006/main">
+            <a:r>
+              <a:rPr lang="en-US" sz="1500" b="0">
+                <a:solidFill>
+                  <a:srgbClr val="1A202C"/>
+                </a:solidFill>
+                <a:latin typeface="Calibri"/>
+                <a:ea typeface="Calibri"/>
+              </a:rPr>
+              <a:t>• EM Tools — Roadmap / planning kickoff norms</a:t>
+            </a:r>
+          </a:p>
+          <a:p xmlns:a="http://schemas.openxmlformats.org/drawingml/2006/main">
+            <a:r>
+              <a:rPr lang="en-US" sz="1500" b="0">
+                <a:solidFill>
+                  <a:srgbClr val="1A202C"/>
+                </a:solidFill>
+                <a:latin typeface="Calibri"/>
+                <a:ea typeface="Calibri"/>
+              </a:rPr>
+              <a:t>  https://www.em-tools.io/engineering-manager-responsibilities/roadmap-planning</a:t>
+            </a:r>
+          </a:p>
+          <a:p xmlns:a="http://schemas.openxmlformats.org/drawingml/2006/main">
+            <a:r>
+              <a:rPr lang="en-US" sz="1500" b="0">
+                <a:solidFill>
+                  <a:srgbClr val="1A202C"/>
+                </a:solidFill>
+                <a:latin typeface="Calibri"/>
+                <a:ea typeface="Calibri"/>
+              </a:rPr>
+              <a:t>• BLUF executive framing</a:t>
+            </a:r>
+          </a:p>
+          <a:p xmlns:a="http://schemas.openxmlformats.org/drawingml/2006/main">
+            <a:r>
+              <a:rPr lang="en-US" sz="1500" b="0">
+                <a:solidFill>
+                  <a:srgbClr val="1A202C"/>
+                </a:solidFill>
+                <a:latin typeface="Calibri"/>
+                <a:ea typeface="Calibri"/>
+              </a:rPr>
+              <a:t>  https://www.getorvo.com/learn/executive-communication-strategy</a:t>
+            </a:r>
+          </a:p>
+          <a:p xmlns:a="http://schemas.openxmlformats.org/drawingml/2006/main">
+            <a:r>
+              <a:rPr lang="en-US" sz="1500" b="0">
+                <a:solidFill>
+                  <a:srgbClr val="1A202C"/>
+                </a:solidFill>
+                <a:latin typeface="Calibri"/>
+                <a:ea typeface="Calibri"/>
+              </a:rPr>
+              <a:t/>
+            </a:r>
+          </a:p>
+          <a:p xmlns:a="http://schemas.openxmlformats.org/drawingml/2006/main">
+            <a:r>
+              <a:rPr lang="en-US" sz="1500" b="0">
+                <a:solidFill>
+                  <a:srgbClr val="1A202C"/>
+                </a:solidFill>
+                <a:latin typeface="Calibri"/>
+                <a:ea typeface="Calibri"/>
+              </a:rPr>
+              <a:t>How to use: copy section order and decision verbs; replace with your metrics.</a:t>
+            </a:r>
+          </a:p>
+          <a:p xmlns:a="http://schemas.openxmlformats.org/drawingml/2006/main">
+            <a:r>
+              <a:rPr lang="en-US" sz="1500" b="0">
+                <a:solidFill>
+                  <a:srgbClr val="1A202C"/>
+                </a:solidFill>
+                <a:latin typeface="Calibri"/>
+                <a:ea typeface="Calibri"/>
+              </a:rPr>
+              <a:t>In-repo: skills/presentations/classic-public-cases.md</a:t>
+            </a:r>
+          </a:p>
+        </p:txBody>
+      </p:sp>
+      <p:sp>
+        <p:nvSpPr>
+          <p:cNvPr id="100008" name="TextBox 4"/>
+          <p:cNvSpPr txBox="1"/>
+          <p:nvPr/>
+        </p:nvSpPr>
+        <p:spPr>
+          <a:xfrm xmlns:a="http://schemas.openxmlformats.org/drawingml/2006/main">
+            <a:off x="504000" y="6426000"/>
+            <a:ext cx="11088000" cy="306000"/>
+          </a:xfrm>
+          <a:prstGeom xmlns:a="http://schemas.openxmlformats.org/drawingml/2006/main" prst="rect">
+            <a:avLst/>
+          </a:prstGeom>
+        </p:spPr>
+        <p:txBody>
+          <a:bodyPr xmlns:a="http://schemas.openxmlformats.org/drawingml/2006/main"/>
+          <a:lstStyle xmlns:a="http://schemas.openxmlformats.org/drawingml/2006/main"/>
+          <a:p xmlns:a="http://schemas.openxmlformats.org/drawingml/2006/main">
+            <a:r>
+              <a:rPr lang="en-US" sz="1100" b="0">
+                <a:solidFill>
+                  <a:srgbClr val="718096"/>
+                </a:solidFill>
+                <a:latin typeface="Calibri"/>
+                <a:ea typeface="Calibri"/>
+              </a:rPr>
+              <a:t>Atlas Platform  ·  Project Aurora  ·  NovaSemi  ·  2026</a:t>
+            </a:r>
+          </a:p>
+        </p:txBody>
+      </p:sp>
+    </p:spTree>
+  </p:cSld>
+</p:sld>
+</file>
+
+<file path=ppt/slides/slide3.xml><?xml version="1.0" encoding="utf-8"?>
 <p:sld xmlns:p="http://schemas.openxmlformats.org/presentationml/2006/main">
   <p:cSld name="BLUF — endorse balanced Q3 plan (Option B)">
     <p:bg>
@@ -1223,7 +1620,7 @@
       <p:grpSpPr/>
       <p:sp>
         <p:nvSpPr>
-          <p:cNvPr id="100004" name="TextBox 1"/>
+          <p:cNvPr id="100009" name="TextBox 1"/>
           <p:cNvSpPr txBox="1"/>
           <p:nvPr/>
         </p:nvSpPr>
@@ -1255,7 +1652,7 @@
       </p:sp>
       <p:sp>
         <p:nvSpPr>
-          <p:cNvPr id="100005" name="TextBox 2"/>
+          <p:cNvPr id="100010" name="TextBox 2"/>
           <p:cNvSpPr txBox="1"/>
           <p:nvPr/>
         </p:nvSpPr>
@@ -1287,7 +1684,7 @@
       </p:sp>
       <p:sp>
         <p:nvSpPr>
-          <p:cNvPr id="100006" name="TextBox 3"/>
+          <p:cNvPr id="100011" name="TextBox 3"/>
           <p:cNvSpPr txBox="1"/>
           <p:nvPr/>
         </p:nvSpPr>
@@ -1322,7 +1719,7 @@
       </p:sp>
       <p:sp>
         <p:nvSpPr>
-          <p:cNvPr id="100007" name="TextBox 4"/>
+          <p:cNvPr id="100012" name="TextBox 4"/>
           <p:cNvSpPr txBox="1"/>
           <p:nvPr/>
         </p:nvSpPr>
@@ -1405,7 +1802,7 @@
       </p:sp>
       <p:sp>
         <p:nvSpPr>
-          <p:cNvPr id="100008" name="TextBox 5"/>
+          <p:cNvPr id="100013" name="TextBox 5"/>
           <p:cNvSpPr txBox="1"/>
           <p:nvPr/>
         </p:nvSpPr>
@@ -1440,7 +1837,7 @@
 </p:sld>
 </file>
 
-<file path=ppt/slides/slide3.xml><?xml version="1.0" encoding="utf-8"?>
+<file path=ppt/slides/slide4.xml><?xml version="1.0" encoding="utf-8"?>
 <p:sld xmlns:p="http://schemas.openxmlformats.org/presentationml/2006/main">
   <p:cSld name="Outcomes &amp; success metrics">
     <p:bg>
@@ -1459,7 +1856,7 @@
       <p:grpSpPr/>
       <p:sp>
         <p:nvSpPr>
-          <p:cNvPr id="100009" name="TextBox 1"/>
+          <p:cNvPr id="100014" name="TextBox 1"/>
           <p:cNvSpPr txBox="1"/>
           <p:nvPr/>
         </p:nvSpPr>
@@ -1491,7 +1888,7 @@
       </p:sp>
       <p:sp>
         <p:nvSpPr>
-          <p:cNvPr id="100010" name="TextBox 2"/>
+          <p:cNvPr id="100015" name="TextBox 2"/>
           <p:cNvSpPr txBox="1"/>
           <p:nvPr/>
         </p:nvSpPr>
@@ -1574,7 +1971,7 @@
       </p:sp>
       <p:sp>
         <p:nvSpPr>
-          <p:cNvPr id="100011" name="TextBox 3"/>
+          <p:cNvPr id="100016" name="TextBox 3"/>
           <p:cNvSpPr txBox="1"/>
           <p:nvPr/>
         </p:nvSpPr>
@@ -1609,7 +2006,7 @@
 </p:sld>
 </file>
 
-<file path=ppt/slides/slide4.xml><?xml version="1.0" encoding="utf-8"?>
+<file path=ppt/slides/slide5.xml><?xml version="1.0" encoding="utf-8"?>
 <p:sld xmlns:p="http://schemas.openxmlformats.org/presentationml/2006/main">
   <p:cSld name="Milestones &amp; working agreements">
     <p:bg>
@@ -1628,7 +2025,7 @@
       <p:grpSpPr/>
       <p:sp>
         <p:nvSpPr>
-          <p:cNvPr id="100012" name="TextBox 1"/>
+          <p:cNvPr id="100017" name="TextBox 1"/>
           <p:cNvSpPr txBox="1"/>
           <p:nvPr/>
         </p:nvSpPr>
@@ -1660,7 +2057,7 @@
       </p:sp>
       <p:sp>
         <p:nvSpPr>
-          <p:cNvPr id="100013" name="TextBox 2"/>
+          <p:cNvPr id="100018" name="TextBox 2"/>
           <p:cNvSpPr txBox="1"/>
           <p:nvPr/>
         </p:nvSpPr>
@@ -1731,7 +2128,7 @@
       </p:sp>
       <p:sp>
         <p:nvSpPr>
-          <p:cNvPr id="100014" name="TextBox 3"/>
+          <p:cNvPr id="100019" name="TextBox 3"/>
           <p:cNvSpPr txBox="1"/>
           <p:nvPr/>
         </p:nvSpPr>
@@ -1766,7 +2163,7 @@
 </p:sld>
 </file>
 
-<file path=ppt/slides/slide5.xml><?xml version="1.0" encoding="utf-8"?>
+<file path=ppt/slides/slide6.xml><?xml version="1.0" encoding="utf-8"?>
 <p:sld xmlns:p="http://schemas.openxmlformats.org/presentationml/2006/main">
   <p:cSld name="Options &amp; recommendation">
     <p:bg>
@@ -1785,7 +2182,7 @@
       <p:grpSpPr/>
       <p:sp>
         <p:nvSpPr>
-          <p:cNvPr id="100015" name="TextBox 1"/>
+          <p:cNvPr id="100020" name="TextBox 1"/>
           <p:cNvSpPr txBox="1"/>
           <p:nvPr/>
         </p:nvSpPr>
@@ -1817,7 +2214,7 @@
       </p:sp>
       <p:sp>
         <p:nvSpPr>
-          <p:cNvPr id="100016" name="TextBox 2"/>
+          <p:cNvPr id="100021" name="TextBox 2"/>
           <p:cNvSpPr txBox="1"/>
           <p:nvPr/>
         </p:nvSpPr>
@@ -1849,7 +2246,7 @@
       </p:sp>
       <p:graphicFrame>
         <p:nvGraphicFramePr>
-          <p:cNvPr id="100017" name="Table 1"/>
+          <p:cNvPr id="100022" name="Table 1"/>
           <p:cNvGraphicFramePr/>
           <p:nvPr/>
         </p:nvGraphicFramePr>
@@ -2249,7 +2646,7 @@
       </p:graphicFrame>
       <p:sp>
         <p:nvSpPr>
-          <p:cNvPr id="100018" name="TextBox 3"/>
+          <p:cNvPr id="100023" name="TextBox 3"/>
           <p:cNvSpPr txBox="1"/>
           <p:nvPr/>
         </p:nvSpPr>
@@ -2284,7 +2681,7 @@
 </p:sld>
 </file>
 
-<file path=ppt/slides/slide6.xml><?xml version="1.0" encoding="utf-8"?>
+<file path=ppt/slides/slide7.xml><?xml version="1.0" encoding="utf-8"?>
 <p:sld xmlns:p="http://schemas.openxmlformats.org/presentationml/2006/main">
   <p:cSld name="Decision &amp; ask">
     <p:bg>
@@ -2303,7 +2700,7 @@
       <p:grpSpPr/>
       <p:sp>
         <p:nvSpPr>
-          <p:cNvPr id="100019" name="TextBox 1"/>
+          <p:cNvPr id="100024" name="TextBox 1"/>
           <p:cNvSpPr txBox="1"/>
           <p:nvPr/>
         </p:nvSpPr>
@@ -2335,7 +2732,7 @@
       </p:sp>
       <p:sp>
         <p:nvSpPr>
-          <p:cNvPr id="100020" name="TextBox 2"/>
+          <p:cNvPr id="100025" name="TextBox 2"/>
           <p:cNvSpPr txBox="1"/>
           <p:nvPr/>
         </p:nvSpPr>
@@ -2367,7 +2764,7 @@
       </p:sp>
       <p:sp>
         <p:nvSpPr>
-          <p:cNvPr id="100021" name="TextBox 3"/>
+          <p:cNvPr id="100026" name="TextBox 3"/>
           <p:cNvSpPr txBox="1"/>
           <p:nvPr/>
         </p:nvSpPr>
@@ -2426,7 +2823,7 @@
       </p:sp>
       <p:sp>
         <p:nvSpPr>
-          <p:cNvPr id="100022" name="TextBox 4"/>
+          <p:cNvPr id="100027" name="TextBox 4"/>
           <p:cNvSpPr txBox="1"/>
           <p:nvPr/>
         </p:nvSpPr>

--- a/skills/presentations/assets/pptx/examples/08-period-start-planning.pptx
+++ b/skills/presentations/assets/pptx/examples/08-period-start-planning.pptx
@@ -5,16 +5,17 @@
     <p:sldMasterId xmlns:r="http://schemas.openxmlformats.org/officeDocument/2006/relationships" id="2147483648" r:id="rId1"/>
   </p:sldMasterIdLst>
   <p:notesMasterIdLst>
-    <p:notesMasterId r:id="R9c3a82937ebf4f23"/>
+    <p:notesMasterId r:id="Rcc97b2ca20bf4ef1"/>
   </p:notesMasterIdLst>
   <p:sldIdLst>
-    <p:sldId id="256" r:id="R9851a1b6a4164ec4"/>
-    <p:sldId id="257" r:id="R53c443695e754207"/>
-    <p:sldId id="258" r:id="R82d182de939f430b"/>
-    <p:sldId id="259" r:id="Rd464be214cbe4242"/>
-    <p:sldId id="260" r:id="R3de32d78de424c1c"/>
-    <p:sldId id="261" r:id="R5fed7613dad04a1a"/>
-    <p:sldId id="262" r:id="R99894374e2fb4548"/>
+    <p:sldId id="256" r:id="R74f09166174d483f"/>
+    <p:sldId id="257" r:id="R484a03019fa14f07"/>
+    <p:sldId id="258" r:id="R3a3f79cac4264c2a"/>
+    <p:sldId id="259" r:id="R4aa2bcc647b34333"/>
+    <p:sldId id="260" r:id="Rf3ddc60a21f94549"/>
+    <p:sldId id="261" r:id="R73a5324ec3874402"/>
+    <p:sldId id="262" r:id="Redf73ad7ba7d4a09"/>
+    <p:sldId id="263" r:id="R82d98d1f555242a7"/>
   </p:sldIdLst>
   <p:sldSz cx="12192000" cy="6858000"/>
   <p:notesSz cx="6858000" cy="9144000"/>
@@ -623,7 +624,7 @@
           <a:p xmlns:a="http://schemas.openxmlformats.org/drawingml/2006/main">
             <a:r>
               <a:rPr lang="en-US"/>
-              <a:t>Balanced commit with stretch labeled.</a:t>
+              <a:t>Agent/human: answer who/stakes/decision from this slide alone. Recommend=Option B: COMMIT sample SLA + revB AON start + USB3 close; STRETCH WiFi; OUT sensor hub. by 2026-07-01 kickoff.</a:t>
             </a:r>
           </a:p>
         </p:txBody>
@@ -678,7 +679,7 @@
           <a:p xmlns:a="http://schemas.openxmlformats.org/drawingml/2006/main">
             <a:r>
               <a:rPr lang="en-US"/>
-              <a:t>Clear commit/stretch/out.</a:t>
+              <a:t>Balanced commit with stretch labeled.</a:t>
             </a:r>
           </a:p>
         </p:txBody>
@@ -733,7 +734,7 @@
           <a:p xmlns:a="http://schemas.openxmlformats.org/drawingml/2006/main">
             <a:r>
               <a:rPr lang="en-US"/>
-              <a:t>OS + gates.</a:t>
+              <a:t>Clear commit/stretch/out.</a:t>
             </a:r>
           </a:p>
         </p:txBody>
@@ -788,7 +789,7 @@
           <a:p xmlns:a="http://schemas.openxmlformats.org/drawingml/2006/main">
             <a:r>
               <a:rPr lang="en-US"/>
-              <a:t>Walk trade-offs; land recommendation.</a:t>
+              <a:t>OS + gates.</a:t>
             </a:r>
           </a:p>
         </p:txBody>
@@ -802,6 +803,61 @@
 </file>
 
 <file path=ppt/notesSlides/notesSlide7.xml><?xml version="1.0" encoding="utf-8"?>
+<p:notes xmlns:p="http://schemas.openxmlformats.org/presentationml/2006/main">
+  <p:cSld>
+    <p:spTree>
+      <p:nvGrpSpPr>
+        <p:cNvPr id="1" name=""/>
+        <p:cNvGrpSpPr/>
+        <p:nvPr/>
+      </p:nvGrpSpPr>
+      <p:grpSpPr>
+        <a:xfrm xmlns:a="http://schemas.openxmlformats.org/drawingml/2006/main"/>
+      </p:grpSpPr>
+      <p:sp>
+        <p:nvSpPr>
+          <p:cNvPr id="2" name="Slide Image Placeholder 1"/>
+          <p:cNvSpPr/>
+          <p:nvPr>
+            <p:ph type="sldImg" idx="0"/>
+          </p:nvPr>
+        </p:nvSpPr>
+        <p:spPr/>
+        <p:txBody>
+          <a:bodyPr xmlns:a="http://schemas.openxmlformats.org/drawingml/2006/main"/>
+          <a:lstStyle xmlns:a="http://schemas.openxmlformats.org/drawingml/2006/main"/>
+          <a:p xmlns:a="http://schemas.openxmlformats.org/drawingml/2006/main"/>
+        </p:txBody>
+      </p:sp>
+      <p:sp>
+        <p:nvSpPr>
+          <p:cNvPr id="3" name="Notes Placeholder 2"/>
+          <p:cNvSpPr/>
+          <p:nvPr>
+            <p:ph type="body" idx="1"/>
+          </p:nvPr>
+        </p:nvSpPr>
+        <p:spPr/>
+        <p:txBody>
+          <a:bodyPr xmlns:a="http://schemas.openxmlformats.org/drawingml/2006/main"/>
+          <a:lstStyle xmlns:a="http://schemas.openxmlformats.org/drawingml/2006/main"/>
+          <a:p xmlns:a="http://schemas.openxmlformats.org/drawingml/2006/main">
+            <a:r>
+              <a:rPr lang="en-US"/>
+              <a:t>Walk trade-offs; land recommendation.</a:t>
+            </a:r>
+          </a:p>
+        </p:txBody>
+      </p:sp>
+    </p:spTree>
+  </p:cSld>
+  <p:clrMapOvr>
+    <a:masterClrMapping xmlns:a="http://schemas.openxmlformats.org/drawingml/2006/main"/>
+  </p:clrMapOvr>
+</p:notes>
+</file>
+
+<file path=ppt/notesSlides/notesSlide8.xml><?xml version="1.0" encoding="utf-8"?>
 <p:notes xmlns:p="http://schemas.openxmlformats.org/presentationml/2006/main">
   <p:cSld>
     <p:spTree>
@@ -1603,6 +1659,387 @@
 
 <file path=ppt/slides/slide3.xml><?xml version="1.0" encoding="utf-8"?>
 <p:sld xmlns:p="http://schemas.openxmlformats.org/presentationml/2006/main">
+  <p:cSld name="Situation &amp; decision card">
+    <p:bg>
+      <p:bgPr>
+        <a:solidFill xmlns:a="http://schemas.openxmlformats.org/drawingml/2006/main">
+          <a:srgbClr val="F4F7FC"/>
+        </a:solidFill>
+      </p:bgPr>
+    </p:bg>
+    <p:spTree>
+      <p:nvGrpSpPr>
+        <p:cNvPr id="1" name=""/>
+        <p:cNvGrpSpPr/>
+        <p:nvPr/>
+      </p:nvGrpSpPr>
+      <p:grpSpPr/>
+      <p:sp>
+        <p:nvSpPr>
+          <p:cNvPr id="100009" name="TextBox 1"/>
+          <p:cNvSpPr txBox="1"/>
+          <p:nvPr/>
+        </p:nvSpPr>
+        <p:spPr>
+          <a:xfrm xmlns:a="http://schemas.openxmlformats.org/drawingml/2006/main">
+            <a:off x="504000" y="270000"/>
+            <a:ext cx="11088000" cy="270000"/>
+          </a:xfrm>
+          <a:prstGeom xmlns:a="http://schemas.openxmlformats.org/drawingml/2006/main" prst="rect">
+            <a:avLst/>
+          </a:prstGeom>
+        </p:spPr>
+        <p:txBody>
+          <a:bodyPr xmlns:a="http://schemas.openxmlformats.org/drawingml/2006/main"/>
+          <a:lstStyle xmlns:a="http://schemas.openxmlformats.org/drawingml/2006/main"/>
+          <a:p xmlns:a="http://schemas.openxmlformats.org/drawingml/2006/main">
+            <a:r>
+              <a:rPr lang="en-US" sz="1100" b="1">
+                <a:solidFill>
+                  <a:srgbClr val="2B6CB0"/>
+                </a:solidFill>
+                <a:latin typeface="Calibri"/>
+                <a:ea typeface="Calibri"/>
+              </a:rPr>
+              <a:t>READ THIS BEFORE THE DETAILS</a:t>
+            </a:r>
+          </a:p>
+        </p:txBody>
+      </p:sp>
+      <p:sp>
+        <p:nvSpPr>
+          <p:cNvPr id="100010" name="TextBox 2"/>
+          <p:cNvSpPr txBox="1"/>
+          <p:nvPr/>
+        </p:nvSpPr>
+        <p:spPr>
+          <a:xfrm xmlns:a="http://schemas.openxmlformats.org/drawingml/2006/main">
+            <a:off x="504000" y="558000"/>
+            <a:ext cx="11088000" cy="612000"/>
+          </a:xfrm>
+          <a:prstGeom xmlns:a="http://schemas.openxmlformats.org/drawingml/2006/main" prst="rect">
+            <a:avLst/>
+          </a:prstGeom>
+        </p:spPr>
+        <p:txBody>
+          <a:bodyPr xmlns:a="http://schemas.openxmlformats.org/drawingml/2006/main"/>
+          <a:lstStyle xmlns:a="http://schemas.openxmlformats.org/drawingml/2006/main"/>
+          <a:p xmlns:a="http://schemas.openxmlformats.org/drawingml/2006/main">
+            <a:r>
+              <a:rPr lang="en-US" sz="2800" b="1">
+                <a:solidFill>
+                  <a:srgbClr val="1A202C"/>
+                </a:solidFill>
+                <a:latin typeface="Calibri"/>
+                <a:ea typeface="Calibri"/>
+              </a:rPr>
+              <a:t>Situation &amp; decision card</a:t>
+            </a:r>
+          </a:p>
+        </p:txBody>
+      </p:sp>
+      <p:sp>
+        <p:nvSpPr>
+          <p:cNvPr id="100011" name="TextBox 3"/>
+          <p:cNvSpPr txBox="1"/>
+          <p:nvPr/>
+        </p:nvSpPr>
+        <p:spPr>
+          <a:xfrm xmlns:a="http://schemas.openxmlformats.org/drawingml/2006/main">
+            <a:off x="504000" y="1224000"/>
+            <a:ext cx="11088000" cy="4968000"/>
+          </a:xfrm>
+          <a:prstGeom xmlns:a="http://schemas.openxmlformats.org/drawingml/2006/main" prst="rect">
+            <a:avLst/>
+          </a:prstGeom>
+          <a:solidFill xmlns:a="http://schemas.openxmlformats.org/drawingml/2006/main">
+            <a:srgbClr val="FFFFFF"/>
+          </a:solidFill>
+        </p:spPr>
+        <p:txBody>
+          <a:bodyPr xmlns:a="http://schemas.openxmlformats.org/drawingml/2006/main"/>
+          <a:lstStyle xmlns:a="http://schemas.openxmlformats.org/drawingml/2006/main"/>
+          <a:p xmlns:a="http://schemas.openxmlformats.org/drawingml/2006/main">
+            <a:r>
+              <a:rPr lang="en-US" sz="1300" b="0">
+                <a:solidFill>
+                  <a:srgbClr val="1A202C"/>
+                </a:solidFill>
+                <a:latin typeface="Calibri"/>
+                <a:ea typeface="Calibri"/>
+              </a:rPr>
+              <a:t>Presenter: Alex Chen — EM, Atlas kickoff</a:t>
+            </a:r>
+          </a:p>
+          <a:p xmlns:a="http://schemas.openxmlformats.org/drawingml/2006/main">
+            <a:r>
+              <a:rPr lang="en-US" sz="1300" b="0">
+                <a:solidFill>
+                  <a:srgbClr val="1A202C"/>
+                </a:solidFill>
+                <a:latin typeface="Calibri"/>
+                <a:ea typeface="Calibri"/>
+              </a:rPr>
+              <a:t>Decision-maker: Morgan Lee (endorse Option B period plan)</a:t>
+            </a:r>
+          </a:p>
+          <a:p xmlns:a="http://schemas.openxmlformats.org/drawingml/2006/main">
+            <a:r>
+              <a:rPr lang="en-US" sz="1300" b="0">
+                <a:solidFill>
+                  <a:srgbClr val="1A202C"/>
+                </a:solidFill>
+                <a:latin typeface="Calibri"/>
+                <a:ea typeface="Calibri"/>
+              </a:rPr>
+              <a:t>Audience: Atlas team + VP Eng + key deps (PMIC, package, WiFi IP)</a:t>
+            </a:r>
+          </a:p>
+          <a:p xmlns:a="http://schemas.openxmlformats.org/drawingml/2006/main">
+            <a:r>
+              <a:rPr lang="en-US" sz="1300" b="0">
+                <a:solidFill>
+                  <a:srgbClr val="1A202C"/>
+                </a:solidFill>
+                <a:latin typeface="Calibri"/>
+                <a:ea typeface="Calibri"/>
+              </a:rPr>
+              <a:t/>
+            </a:r>
+          </a:p>
+          <a:p xmlns:a="http://schemas.openxmlformats.org/drawingml/2006/main">
+            <a:r>
+              <a:rPr lang="en-US" sz="1300" b="0">
+                <a:solidFill>
+                  <a:srgbClr val="1A202C"/>
+                </a:solidFill>
+                <a:latin typeface="Calibri"/>
+                <a:ea typeface="Calibri"/>
+              </a:rPr>
+              <a:t>What just happened / context:</a:t>
+            </a:r>
+          </a:p>
+          <a:p xmlns:a="http://schemas.openxmlformats.org/drawingml/2006/main">
+            <a:r>
+              <a:rPr lang="en-US" sz="1300" b="0">
+                <a:solidFill>
+                  <a:srgbClr val="1A202C"/>
+                </a:solidFill>
+                <a:latin typeface="Calibri"/>
+                <a:ea typeface="Calibri"/>
+              </a:rPr>
+              <a:t>Q3 starts 2026-07-01. Samples shipped/plan 6/30. Need shared commit vs stretch vs out so the team does not treat WiFi as silent commit.</a:t>
+            </a:r>
+          </a:p>
+          <a:p xmlns:a="http://schemas.openxmlformats.org/drawingml/2006/main">
+            <a:r>
+              <a:rPr lang="en-US" sz="1300" b="0">
+                <a:solidFill>
+                  <a:srgbClr val="1A202C"/>
+                </a:solidFill>
+                <a:latin typeface="Calibri"/>
+                <a:ea typeface="Calibri"/>
+              </a:rPr>
+              <a:t/>
+            </a:r>
+          </a:p>
+          <a:p xmlns:a="http://schemas.openxmlformats.org/drawingml/2006/main">
+            <a:r>
+              <a:rPr lang="en-US" sz="1300" b="0">
+                <a:solidFill>
+                  <a:srgbClr val="1A202C"/>
+                </a:solidFill>
+                <a:latin typeface="Calibri"/>
+                <a:ea typeface="Calibri"/>
+              </a:rPr>
+              <a:t>Stakes if we get this wrong:</a:t>
+            </a:r>
+          </a:p>
+          <a:p xmlns:a="http://schemas.openxmlformats.org/drawingml/2006/main">
+            <a:r>
+              <a:rPr lang="en-US" sz="1300" b="0">
+                <a:solidFill>
+                  <a:srgbClr val="1A202C"/>
+                </a:solidFill>
+                <a:latin typeface="Calibri"/>
+                <a:ea typeface="Calibri"/>
+              </a:rPr>
+              <a:t>Ambiguous commits → over-promise to WiFi partners or under-serve Tier-1 sample SLA.</a:t>
+            </a:r>
+          </a:p>
+          <a:p xmlns:a="http://schemas.openxmlformats.org/drawingml/2006/main">
+            <a:r>
+              <a:rPr lang="en-US" sz="1300" b="0">
+                <a:solidFill>
+                  <a:srgbClr val="1A202C"/>
+                </a:solidFill>
+                <a:latin typeface="Calibri"/>
+                <a:ea typeface="Calibri"/>
+              </a:rPr>
+              <a:t/>
+            </a:r>
+          </a:p>
+          <a:p xmlns:a="http://schemas.openxmlformats.org/drawingml/2006/main">
+            <a:r>
+              <a:rPr lang="en-US" sz="1300" b="0">
+                <a:solidFill>
+                  <a:srgbClr val="1A202C"/>
+                </a:solidFill>
+                <a:latin typeface="Calibri"/>
+                <a:ea typeface="Calibri"/>
+              </a:rPr>
+              <a:t>Decision needed:</a:t>
+            </a:r>
+          </a:p>
+          <a:p xmlns:a="http://schemas.openxmlformats.org/drawingml/2006/main">
+            <a:r>
+              <a:rPr lang="en-US" sz="1300" b="0">
+                <a:solidFill>
+                  <a:srgbClr val="1A202C"/>
+                </a:solidFill>
+                <a:latin typeface="Calibri"/>
+                <a:ea typeface="Calibri"/>
+              </a:rPr>
+              <a:t>Endorse period plan Option B (balanced) vs A aggressive vs C sample-only.</a:t>
+            </a:r>
+          </a:p>
+          <a:p xmlns:a="http://schemas.openxmlformats.org/drawingml/2006/main">
+            <a:r>
+              <a:rPr lang="en-US" sz="1300" b="0">
+                <a:solidFill>
+                  <a:srgbClr val="1A202C"/>
+                </a:solidFill>
+                <a:latin typeface="Calibri"/>
+                <a:ea typeface="Calibri"/>
+              </a:rPr>
+              <a:t/>
+            </a:r>
+          </a:p>
+          <a:p xmlns:a="http://schemas.openxmlformats.org/drawingml/2006/main">
+            <a:r>
+              <a:rPr lang="en-US" sz="1300" b="0">
+                <a:solidFill>
+                  <a:srgbClr val="1A202C"/>
+                </a:solidFill>
+                <a:latin typeface="Calibri"/>
+                <a:ea typeface="Calibri"/>
+              </a:rPr>
+              <a:t>Recommendation: Option B: COMMIT sample SLA + revB AON start + USB3 close; STRETCH WiFi; OUT sensor hub.</a:t>
+            </a:r>
+          </a:p>
+          <a:p xmlns:a="http://schemas.openxmlformats.org/drawingml/2006/main">
+            <a:r>
+              <a:rPr lang="en-US" sz="1300" b="0">
+                <a:solidFill>
+                  <a:srgbClr val="1A202C"/>
+                </a:solidFill>
+                <a:latin typeface="Calibri"/>
+                <a:ea typeface="Calibri"/>
+              </a:rPr>
+              <a:t>If YES: Team executes one scoreboard; stretch only if sample green.</a:t>
+            </a:r>
+          </a:p>
+          <a:p xmlns:a="http://schemas.openxmlformats.org/drawingml/2006/main">
+            <a:r>
+              <a:rPr lang="en-US" sz="1300" b="0">
+                <a:solidFill>
+                  <a:srgbClr val="1A202C"/>
+                </a:solidFill>
+                <a:latin typeface="Calibri"/>
+                <a:ea typeface="Calibri"/>
+              </a:rPr>
+              <a:t>If NO / delay: A needs more HC/contractor; C abandons revB residual from 01.</a:t>
+            </a:r>
+          </a:p>
+          <a:p xmlns:a="http://schemas.openxmlformats.org/drawingml/2006/main">
+            <a:r>
+              <a:rPr lang="en-US" sz="1300" b="0">
+                <a:solidFill>
+                  <a:srgbClr val="1A202C"/>
+                </a:solidFill>
+                <a:latin typeface="Calibri"/>
+                <a:ea typeface="Calibri"/>
+              </a:rPr>
+              <a:t/>
+            </a:r>
+          </a:p>
+          <a:p xmlns:a="http://schemas.openxmlformats.org/drawingml/2006/main">
+            <a:r>
+              <a:rPr lang="en-US" sz="1300" b="0">
+                <a:solidFill>
+                  <a:srgbClr val="1A202C"/>
+                </a:solidFill>
+                <a:latin typeface="Calibri"/>
+                <a:ea typeface="Calibri"/>
+              </a:rPr>
+              <a:t>Decide by: 2026-07-01 kickoff</a:t>
+            </a:r>
+          </a:p>
+          <a:p xmlns:a="http://schemas.openxmlformats.org/drawingml/2006/main">
+            <a:r>
+              <a:rPr lang="en-US" sz="1300" b="0">
+                <a:solidFill>
+                  <a:srgbClr val="1A202C"/>
+                </a:solidFill>
+                <a:latin typeface="Calibri"/>
+                <a:ea typeface="Calibri"/>
+              </a:rPr>
+              <a:t>Arc prior: 09 QBR asked for Q3 B; 07 roadmap themes; 06 hire in flight</a:t>
+            </a:r>
+          </a:p>
+          <a:p xmlns:a="http://schemas.openxmlformats.org/drawingml/2006/main">
+            <a:r>
+              <a:rPr lang="en-US" sz="1300" b="0">
+                <a:solidFill>
+                  <a:srgbClr val="1A202C"/>
+                </a:solidFill>
+                <a:latin typeface="Calibri"/>
+                <a:ea typeface="Calibri"/>
+              </a:rPr>
+              <a:t>Arc next: (feeds next QBR) execute against this commit table</a:t>
+            </a:r>
+          </a:p>
+        </p:txBody>
+      </p:sp>
+      <p:sp>
+        <p:nvSpPr>
+          <p:cNvPr id="100012" name="TextBox 4"/>
+          <p:cNvSpPr txBox="1"/>
+          <p:nvPr/>
+        </p:nvSpPr>
+        <p:spPr>
+          <a:xfrm xmlns:a="http://schemas.openxmlformats.org/drawingml/2006/main">
+            <a:off x="504000" y="6426000"/>
+            <a:ext cx="11088000" cy="306000"/>
+          </a:xfrm>
+          <a:prstGeom xmlns:a="http://schemas.openxmlformats.org/drawingml/2006/main" prst="rect">
+            <a:avLst/>
+          </a:prstGeom>
+        </p:spPr>
+        <p:txBody>
+          <a:bodyPr xmlns:a="http://schemas.openxmlformats.org/drawingml/2006/main"/>
+          <a:lstStyle xmlns:a="http://schemas.openxmlformats.org/drawingml/2006/main"/>
+          <a:p xmlns:a="http://schemas.openxmlformats.org/drawingml/2006/main">
+            <a:r>
+              <a:rPr lang="en-US" sz="1100" b="0">
+                <a:solidFill>
+                  <a:srgbClr val="718096"/>
+                </a:solidFill>
+                <a:latin typeface="Calibri"/>
+                <a:ea typeface="Calibri"/>
+              </a:rPr>
+              <a:t>Atlas Platform  ·  Project Aurora  ·  NovaSemi  ·  2026</a:t>
+            </a:r>
+          </a:p>
+        </p:txBody>
+      </p:sp>
+    </p:spTree>
+  </p:cSld>
+</p:sld>
+</file>
+
+<file path=ppt/slides/slide4.xml><?xml version="1.0" encoding="utf-8"?>
+<p:sld xmlns:p="http://schemas.openxmlformats.org/presentationml/2006/main">
   <p:cSld name="BLUF — endorse balanced Q3 plan (Option B)">
     <p:bg>
       <p:bgPr>
@@ -1620,7 +2057,7 @@
       <p:grpSpPr/>
       <p:sp>
         <p:nvSpPr>
-          <p:cNvPr id="100009" name="TextBox 1"/>
+          <p:cNvPr id="100013" name="TextBox 1"/>
           <p:cNvSpPr txBox="1"/>
           <p:nvPr/>
         </p:nvSpPr>
@@ -1652,7 +2089,7 @@
       </p:sp>
       <p:sp>
         <p:nvSpPr>
-          <p:cNvPr id="100010" name="TextBox 2"/>
+          <p:cNvPr id="100014" name="TextBox 2"/>
           <p:cNvSpPr txBox="1"/>
           <p:nvPr/>
         </p:nvSpPr>
@@ -1684,7 +2121,7 @@
       </p:sp>
       <p:sp>
         <p:nvSpPr>
-          <p:cNvPr id="100011" name="TextBox 3"/>
+          <p:cNvPr id="100015" name="TextBox 3"/>
           <p:cNvSpPr txBox="1"/>
           <p:nvPr/>
         </p:nvSpPr>
@@ -1719,7 +2156,7 @@
       </p:sp>
       <p:sp>
         <p:nvSpPr>
-          <p:cNvPr id="100012" name="TextBox 4"/>
+          <p:cNvPr id="100016" name="TextBox 4"/>
           <p:cNvSpPr txBox="1"/>
           <p:nvPr/>
         </p:nvSpPr>
@@ -1802,7 +2239,7 @@
       </p:sp>
       <p:sp>
         <p:nvSpPr>
-          <p:cNvPr id="100013" name="TextBox 5"/>
+          <p:cNvPr id="100017" name="TextBox 5"/>
           <p:cNvSpPr txBox="1"/>
           <p:nvPr/>
         </p:nvSpPr>
@@ -1837,7 +2274,7 @@
 </p:sld>
 </file>
 
-<file path=ppt/slides/slide4.xml><?xml version="1.0" encoding="utf-8"?>
+<file path=ppt/slides/slide5.xml><?xml version="1.0" encoding="utf-8"?>
 <p:sld xmlns:p="http://schemas.openxmlformats.org/presentationml/2006/main">
   <p:cSld name="Outcomes &amp; success metrics">
     <p:bg>
@@ -1856,7 +2293,7 @@
       <p:grpSpPr/>
       <p:sp>
         <p:nvSpPr>
-          <p:cNvPr id="100014" name="TextBox 1"/>
+          <p:cNvPr id="100018" name="TextBox 1"/>
           <p:cNvSpPr txBox="1"/>
           <p:nvPr/>
         </p:nvSpPr>
@@ -1888,7 +2325,7 @@
       </p:sp>
       <p:sp>
         <p:nvSpPr>
-          <p:cNvPr id="100015" name="TextBox 2"/>
+          <p:cNvPr id="100019" name="TextBox 2"/>
           <p:cNvSpPr txBox="1"/>
           <p:nvPr/>
         </p:nvSpPr>
@@ -1971,7 +2408,7 @@
       </p:sp>
       <p:sp>
         <p:nvSpPr>
-          <p:cNvPr id="100016" name="TextBox 3"/>
+          <p:cNvPr id="100020" name="TextBox 3"/>
           <p:cNvSpPr txBox="1"/>
           <p:nvPr/>
         </p:nvSpPr>
@@ -2006,7 +2443,7 @@
 </p:sld>
 </file>
 
-<file path=ppt/slides/slide5.xml><?xml version="1.0" encoding="utf-8"?>
+<file path=ppt/slides/slide6.xml><?xml version="1.0" encoding="utf-8"?>
 <p:sld xmlns:p="http://schemas.openxmlformats.org/presentationml/2006/main">
   <p:cSld name="Milestones &amp; working agreements">
     <p:bg>
@@ -2025,7 +2462,7 @@
       <p:grpSpPr/>
       <p:sp>
         <p:nvSpPr>
-          <p:cNvPr id="100017" name="TextBox 1"/>
+          <p:cNvPr id="100021" name="TextBox 1"/>
           <p:cNvSpPr txBox="1"/>
           <p:nvPr/>
         </p:nvSpPr>
@@ -2057,7 +2494,7 @@
       </p:sp>
       <p:sp>
         <p:nvSpPr>
-          <p:cNvPr id="100018" name="TextBox 2"/>
+          <p:cNvPr id="100022" name="TextBox 2"/>
           <p:cNvSpPr txBox="1"/>
           <p:nvPr/>
         </p:nvSpPr>
@@ -2128,7 +2565,7 @@
       </p:sp>
       <p:sp>
         <p:nvSpPr>
-          <p:cNvPr id="100019" name="TextBox 3"/>
+          <p:cNvPr id="100023" name="TextBox 3"/>
           <p:cNvSpPr txBox="1"/>
           <p:nvPr/>
         </p:nvSpPr>
@@ -2163,7 +2600,7 @@
 </p:sld>
 </file>
 
-<file path=ppt/slides/slide6.xml><?xml version="1.0" encoding="utf-8"?>
+<file path=ppt/slides/slide7.xml><?xml version="1.0" encoding="utf-8"?>
 <p:sld xmlns:p="http://schemas.openxmlformats.org/presentationml/2006/main">
   <p:cSld name="Options &amp; recommendation">
     <p:bg>
@@ -2182,7 +2619,7 @@
       <p:grpSpPr/>
       <p:sp>
         <p:nvSpPr>
-          <p:cNvPr id="100020" name="TextBox 1"/>
+          <p:cNvPr id="100024" name="TextBox 1"/>
           <p:cNvSpPr txBox="1"/>
           <p:nvPr/>
         </p:nvSpPr>
@@ -2214,7 +2651,7 @@
       </p:sp>
       <p:sp>
         <p:nvSpPr>
-          <p:cNvPr id="100021" name="TextBox 2"/>
+          <p:cNvPr id="100025" name="TextBox 2"/>
           <p:cNvSpPr txBox="1"/>
           <p:nvPr/>
         </p:nvSpPr>
@@ -2246,7 +2683,7 @@
       </p:sp>
       <p:graphicFrame>
         <p:nvGraphicFramePr>
-          <p:cNvPr id="100022" name="Table 1"/>
+          <p:cNvPr id="100026" name="Table 1"/>
           <p:cNvGraphicFramePr/>
           <p:nvPr/>
         </p:nvGraphicFramePr>
@@ -2646,7 +3083,7 @@
       </p:graphicFrame>
       <p:sp>
         <p:nvSpPr>
-          <p:cNvPr id="100023" name="TextBox 3"/>
+          <p:cNvPr id="100027" name="TextBox 3"/>
           <p:cNvSpPr txBox="1"/>
           <p:nvPr/>
         </p:nvSpPr>
@@ -2681,7 +3118,7 @@
 </p:sld>
 </file>
 
-<file path=ppt/slides/slide7.xml><?xml version="1.0" encoding="utf-8"?>
+<file path=ppt/slides/slide8.xml><?xml version="1.0" encoding="utf-8"?>
 <p:sld xmlns:p="http://schemas.openxmlformats.org/presentationml/2006/main">
   <p:cSld name="Decision &amp; ask">
     <p:bg>
@@ -2700,7 +3137,7 @@
       <p:grpSpPr/>
       <p:sp>
         <p:nvSpPr>
-          <p:cNvPr id="100024" name="TextBox 1"/>
+          <p:cNvPr id="100028" name="TextBox 1"/>
           <p:cNvSpPr txBox="1"/>
           <p:nvPr/>
         </p:nvSpPr>
@@ -2732,7 +3169,7 @@
       </p:sp>
       <p:sp>
         <p:nvSpPr>
-          <p:cNvPr id="100025" name="TextBox 2"/>
+          <p:cNvPr id="100029" name="TextBox 2"/>
           <p:cNvSpPr txBox="1"/>
           <p:nvPr/>
         </p:nvSpPr>
@@ -2764,7 +3201,7 @@
       </p:sp>
       <p:sp>
         <p:nvSpPr>
-          <p:cNvPr id="100026" name="TextBox 3"/>
+          <p:cNvPr id="100030" name="TextBox 3"/>
           <p:cNvSpPr txBox="1"/>
           <p:nvPr/>
         </p:nvSpPr>
@@ -2823,7 +3260,7 @@
       </p:sp>
       <p:sp>
         <p:nvSpPr>
-          <p:cNvPr id="100027" name="TextBox 4"/>
+          <p:cNvPr id="100031" name="TextBox 4"/>
           <p:cNvSpPr txBox="1"/>
           <p:nvPr/>
         </p:nvSpPr>

--- a/skills/presentations/assets/pptx/examples/08-period-start-planning.pptx
+++ b/skills/presentations/assets/pptx/examples/08-period-start-planning.pptx
@@ -5,17 +5,17 @@
     <p:sldMasterId xmlns:r="http://schemas.openxmlformats.org/officeDocument/2006/relationships" id="2147483648" r:id="rId1"/>
   </p:sldMasterIdLst>
   <p:notesMasterIdLst>
-    <p:notesMasterId r:id="Rcc97b2ca20bf4ef1"/>
+    <p:notesMasterId r:id="R3daae4f630e242fe"/>
   </p:notesMasterIdLst>
   <p:sldIdLst>
-    <p:sldId id="256" r:id="R74f09166174d483f"/>
-    <p:sldId id="257" r:id="R484a03019fa14f07"/>
-    <p:sldId id="258" r:id="R3a3f79cac4264c2a"/>
-    <p:sldId id="259" r:id="R4aa2bcc647b34333"/>
-    <p:sldId id="260" r:id="Rf3ddc60a21f94549"/>
-    <p:sldId id="261" r:id="R73a5324ec3874402"/>
-    <p:sldId id="262" r:id="Redf73ad7ba7d4a09"/>
-    <p:sldId id="263" r:id="R82d98d1f555242a7"/>
+    <p:sldId id="256" r:id="R4917de31a9f84148"/>
+    <p:sldId id="257" r:id="R621d72945ec74190"/>
+    <p:sldId id="258" r:id="R6f50d384089f4d4a"/>
+    <p:sldId id="259" r:id="R0b319db3c9d242c9"/>
+    <p:sldId id="260" r:id="R531c5841d3ea46ee"/>
+    <p:sldId id="261" r:id="R98ba63f5658349c1"/>
+    <p:sldId id="262" r:id="R97a5be9e45f54bb8"/>
+    <p:sldId id="263" r:id="R2e94774e69924083"/>
   </p:sldIdLst>
   <p:sldSz cx="12192000" cy="6858000"/>
   <p:notesSz cx="6858000" cy="9144000"/>

--- a/skills/presentations/assets/pptx/examples/08-period-start-planning.pptx
+++ b/skills/presentations/assets/pptx/examples/08-period-start-planning.pptx
@@ -5,17 +5,17 @@
     <p:sldMasterId xmlns:r="http://schemas.openxmlformats.org/officeDocument/2006/relationships" id="2147483648" r:id="rId1"/>
   </p:sldMasterIdLst>
   <p:notesMasterIdLst>
-    <p:notesMasterId r:id="R3daae4f630e242fe"/>
+    <p:notesMasterId r:id="Re7c6308e313a4288"/>
   </p:notesMasterIdLst>
   <p:sldIdLst>
-    <p:sldId id="256" r:id="R4917de31a9f84148"/>
-    <p:sldId id="257" r:id="R621d72945ec74190"/>
-    <p:sldId id="258" r:id="R6f50d384089f4d4a"/>
-    <p:sldId id="259" r:id="R0b319db3c9d242c9"/>
-    <p:sldId id="260" r:id="R531c5841d3ea46ee"/>
-    <p:sldId id="261" r:id="R98ba63f5658349c1"/>
-    <p:sldId id="262" r:id="R97a5be9e45f54bb8"/>
-    <p:sldId id="263" r:id="R2e94774e69924083"/>
+    <p:sldId id="256" r:id="Rd85ea0e297574b44"/>
+    <p:sldId id="257" r:id="R792f347c83eb40c4"/>
+    <p:sldId id="258" r:id="R9bbe241274d2425a"/>
+    <p:sldId id="259" r:id="Reb54b09af7fb4650"/>
+    <p:sldId id="260" r:id="R1342b124c6494f55"/>
+    <p:sldId id="261" r:id="R333e543b6e724d50"/>
+    <p:sldId id="262" r:id="R09243d71bd68490a"/>
+    <p:sldId id="263" r:id="Rdcce9aecd4b04a70"/>
   </p:sldIdLst>
   <p:sldSz cx="12192000" cy="6858000"/>
   <p:notesSz cx="6858000" cy="9144000"/>
@@ -1615,7 +1615,19 @@
                 <a:latin typeface="Calibri"/>
                 <a:ea typeface="Calibri"/>
               </a:rPr>
-              <a:t>In-repo: skills/presentations/classic-public-cases.md</a:t>
+              <a:t>CONTENT TEMPLATE ONLY — do not copy visual design (colors, margins, fonts) as a brand system.</a:t>
+            </a:r>
+          </a:p>
+          <a:p xmlns:a="http://schemas.openxmlformats.org/drawingml/2006/main">
+            <a:r>
+              <a:rPr lang="en-US" sz="1500" b="0">
+                <a:solidFill>
+                  <a:srgbClr val="1A202C"/>
+                </a:solidFill>
+                <a:latin typeface="Calibri"/>
+                <a:ea typeface="Calibri"/>
+              </a:rPr>
+              <a:t>In-repo: skills/presentations/classic-public-cases.md · assets/README.md (agent notice)</a:t>
             </a:r>
           </a:p>
         </p:txBody>
